--- a/05/ppt/05-2_수행평가_1_실시와_제출.pptx
+++ b/05/ppt/05-2_수행평가_1_실시와_제출.pptx
@@ -2,18 +2,18 @@
 <file path=ppt/presentation.xml><?xml version="1.0" encoding="utf-8"?>
 <p:presentation xmlns:p="http://schemas.openxmlformats.org/presentationml/2006/main">
   <p:sldMasterIdLst>
-    <p:sldMasterId xmlns:r="http://schemas.openxmlformats.org/officeDocument/2006/relationships" id="2147483648" r:id="R89683069e4db4245"/>
+    <p:sldMasterId xmlns:r="http://schemas.openxmlformats.org/officeDocument/2006/relationships" id="2147483648" r:id="R8839ea7f6952489c"/>
   </p:sldMasterIdLst>
   <p:notesMasterIdLst>
-    <p:notesMasterId xmlns:r="http://schemas.openxmlformats.org/officeDocument/2006/relationships" r:id="Rde1866a6df3e4ccb"/>
+    <p:notesMasterId xmlns:r="http://schemas.openxmlformats.org/officeDocument/2006/relationships" r:id="R1159f24e95044982"/>
   </p:notesMasterIdLst>
   <p:sldIdLst>
-    <p:sldId xmlns:r="http://schemas.openxmlformats.org/officeDocument/2006/relationships" id="256" r:id="R665f75c24a714f0c"/>
-    <p:sldId xmlns:r="http://schemas.openxmlformats.org/officeDocument/2006/relationships" id="257" r:id="R058b4b8f075a407d"/>
-    <p:sldId xmlns:r="http://schemas.openxmlformats.org/officeDocument/2006/relationships" id="258" r:id="Rf95ff6f949ba46c6"/>
-    <p:sldId xmlns:r="http://schemas.openxmlformats.org/officeDocument/2006/relationships" id="259" r:id="Re5b685d7a3a84716"/>
-    <p:sldId xmlns:r="http://schemas.openxmlformats.org/officeDocument/2006/relationships" id="260" r:id="R5f4a5a88ff874d2a"/>
-    <p:sldId xmlns:r="http://schemas.openxmlformats.org/officeDocument/2006/relationships" id="261" r:id="R4038468493564f6e"/>
+    <p:sldId xmlns:r="http://schemas.openxmlformats.org/officeDocument/2006/relationships" id="256" r:id="R4d92c94f6a6f40dd"/>
+    <p:sldId xmlns:r="http://schemas.openxmlformats.org/officeDocument/2006/relationships" id="257" r:id="R97a473ae44c64960"/>
+    <p:sldId xmlns:r="http://schemas.openxmlformats.org/officeDocument/2006/relationships" id="258" r:id="R15d50302c8494c34"/>
+    <p:sldId xmlns:r="http://schemas.openxmlformats.org/officeDocument/2006/relationships" id="259" r:id="Re4cdae86c8d342cc"/>
+    <p:sldId xmlns:r="http://schemas.openxmlformats.org/officeDocument/2006/relationships" id="260" r:id="R576a8637490347ec"/>
+    <p:sldId xmlns:r="http://schemas.openxmlformats.org/officeDocument/2006/relationships" id="261" r:id="Rc763262531b64c21"/>
   </p:sldIdLst>
   <p:sldSz cx="12191695" cy="6858000"/>
   <p:notesSz cx="6858000" cy="9144000"/>
@@ -1008,7 +1008,7 @@
   </p:cSld>
   <p:clrMap bg1="lt1" tx1="dk1" bg2="lt2" tx2="dk2" accent1="accent1" accent2="accent2" accent3="accent3" accent4="accent4" accent5="accent5" accent6="accent6" hlink="hlink" folHlink="folHlink"/>
   <p:sldLayoutIdLst>
-    <p:sldLayoutId xmlns:r="http://schemas.openxmlformats.org/officeDocument/2006/relationships" id="2147483649" r:id="R0fc133fe0b504c2c"/>
+    <p:sldLayoutId xmlns:r="http://schemas.openxmlformats.org/officeDocument/2006/relationships" id="2147483649" r:id="R77aae3348aea4aab"/>
   </p:sldLayoutIdLst>
   <p:hf sldNum="0" hdr="0" ftr="0" dt="0"/>
   <p:txStyles>
@@ -2803,7 +2803,7 @@
           <p:cNvPr id="13" name="">
             <a:extLst xmlns:a="http://schemas.openxmlformats.org/drawingml/2006/main">
               <a:ext uri="{FF2B5EF4-FFF2-40B4-BE49-F238E27FC236}">
-                <a16:creationId xmlns:a16="http://schemas.microsoft.com/office/drawing/2014/main" id="{92A00921-8250-4E21-90E0-B4DDC8037F04}"/>
+                <a16:creationId xmlns:a16="http://schemas.microsoft.com/office/drawing/2014/main" id="{28BBE6EA-A551-4C15-81D2-4D8CA64FF44C}"/>
               </a:ext>
             </a:extLst>
           </p:cNvPr>
@@ -2833,7 +2833,7 @@
           <p:cNvPr id="2" name="">
             <a:extLst xmlns:a="http://schemas.openxmlformats.org/drawingml/2006/main">
               <a:ext uri="{FF2B5EF4-FFF2-40B4-BE49-F238E27FC236}">
-                <a16:creationId xmlns:a16="http://schemas.microsoft.com/office/drawing/2014/main" id="{5753A00C-6B41-46E4-9A32-A7BF3C727ADC}"/>
+                <a16:creationId xmlns:a16="http://schemas.microsoft.com/office/drawing/2014/main" id="{61BD360C-9EE1-4EEF-9774-55FDDA7DF820}"/>
               </a:ext>
             </a:extLst>
           </p:cNvPr>
@@ -2845,7 +2845,7 @@
         <p:spPr>
           <a:xfrm xmlns:a="http://schemas.openxmlformats.org/drawingml/2006/main">
             <a:off x="523875" y="533400"/>
-            <a:ext cx="8858250" cy="476250"/>
+            <a:ext cx="8715375" cy="476250"/>
           </a:xfrm>
           <a:prstGeom xmlns:a="http://schemas.openxmlformats.org/drawingml/2006/main" prst="rect">
             <a:avLst/>
@@ -2890,7 +2890,7 @@
           <p:cNvPr id="3" name="">
             <a:extLst xmlns:a="http://schemas.openxmlformats.org/drawingml/2006/main">
               <a:ext uri="{FF2B5EF4-FFF2-40B4-BE49-F238E27FC236}">
-                <a16:creationId xmlns:a16="http://schemas.microsoft.com/office/drawing/2014/main" id="{7C48C516-50D1-43B4-838A-96D37D519727}"/>
+                <a16:creationId xmlns:a16="http://schemas.microsoft.com/office/drawing/2014/main" id="{27D4008E-5224-41DD-AA2D-B6C7D05D1D69}"/>
               </a:ext>
             </a:extLst>
           </p:cNvPr>
@@ -2947,7 +2947,7 @@
           <p:cNvPr id="4" name="">
             <a:extLst xmlns:a="http://schemas.openxmlformats.org/drawingml/2006/main">
               <a:ext uri="{FF2B5EF4-FFF2-40B4-BE49-F238E27FC236}">
-                <a16:creationId xmlns:a16="http://schemas.microsoft.com/office/drawing/2014/main" id="{ED3DDD55-EA68-44C2-9B7B-7E9A03748D86}"/>
+                <a16:creationId xmlns:a16="http://schemas.microsoft.com/office/drawing/2014/main" id="{9269080F-75F5-4CB6-AB66-76B41AFFD99B}"/>
               </a:ext>
             </a:extLst>
           </p:cNvPr>
@@ -2981,7 +2981,7 @@
           <p:nvPr/>
         </p:nvPicPr>
         <p:blipFill>
-          <a:blip xmlns:r="http://schemas.openxmlformats.org/officeDocument/2006/relationships" xmlns:a="http://schemas.openxmlformats.org/drawingml/2006/main" r:embed="Rb9205b9cbb0c41a8"/>
+          <a:blip xmlns:r="http://schemas.openxmlformats.org/officeDocument/2006/relationships" xmlns:a="http://schemas.openxmlformats.org/drawingml/2006/main" r:embed="R0c5469b043e14880"/>
           <a:stretch xmlns:a="http://schemas.openxmlformats.org/drawingml/2006/main"/>
         </p:blipFill>
         <p:spPr>
@@ -2999,7 +2999,7 @@
           <p:cNvPr id="6" name="">
             <a:extLst xmlns:a="http://schemas.openxmlformats.org/drawingml/2006/main">
               <a:ext uri="{FF2B5EF4-FFF2-40B4-BE49-F238E27FC236}">
-                <a16:creationId xmlns:a16="http://schemas.microsoft.com/office/drawing/2014/main" id="{42F3C001-26E3-4EEB-B4AC-1E29D43E4C89}"/>
+                <a16:creationId xmlns:a16="http://schemas.microsoft.com/office/drawing/2014/main" id="{E6118711-86A1-4C7A-875F-308738E0722C}"/>
               </a:ext>
             </a:extLst>
           </p:cNvPr>
@@ -3033,7 +3033,7 @@
           <p:cNvPr id="7" name="">
             <a:extLst xmlns:a="http://schemas.openxmlformats.org/drawingml/2006/main">
               <a:ext uri="{FF2B5EF4-FFF2-40B4-BE49-F238E27FC236}">
-                <a16:creationId xmlns:a16="http://schemas.microsoft.com/office/drawing/2014/main" id="{593A12FA-011E-4989-B46B-2DF179972FC9}"/>
+                <a16:creationId xmlns:a16="http://schemas.microsoft.com/office/drawing/2014/main" id="{496F8E17-E2A8-4235-8A4A-03ECA4E88F75}"/>
               </a:ext>
             </a:extLst>
           </p:cNvPr>
@@ -3090,7 +3090,7 @@
           <p:cNvPr id="8" name="">
             <a:extLst xmlns:a="http://schemas.openxmlformats.org/drawingml/2006/main">
               <a:ext uri="{FF2B5EF4-FFF2-40B4-BE49-F238E27FC236}">
-                <a16:creationId xmlns:a16="http://schemas.microsoft.com/office/drawing/2014/main" id="{E752B2C2-34D0-49BF-B5C4-714111611230}"/>
+                <a16:creationId xmlns:a16="http://schemas.microsoft.com/office/drawing/2014/main" id="{1EFA23B0-9D15-48DE-AE73-2DF6D557627F}"/>
               </a:ext>
             </a:extLst>
           </p:cNvPr>
@@ -3147,19 +3147,19 @@
           <p:cNvPr id="9" name="">
             <a:extLst xmlns:a="http://schemas.openxmlformats.org/drawingml/2006/main">
               <a:ext uri="{FF2B5EF4-FFF2-40B4-BE49-F238E27FC236}">
-                <a16:creationId xmlns:a16="http://schemas.microsoft.com/office/drawing/2014/main" id="{9F03BDE2-8B3F-4480-83B8-87BBE42800F1}"/>
-              </a:ext>
-            </a:extLst>
-          </p:cNvPr>
-          <p:cNvSpPr>
-            <a:spLocks xmlns:a="http://schemas.openxmlformats.org/drawingml/2006/main" noGrp="1"/>
-          </p:cNvSpPr>
-          <p:nvPr/>
-        </p:nvSpPr>
-        <p:spPr>
-          <a:xfrm xmlns:a="http://schemas.openxmlformats.org/drawingml/2006/main">
-            <a:off x="9124950" y="3067050"/>
-            <a:ext cx="2381250" cy="2381250"/>
+                <a16:creationId xmlns:a16="http://schemas.microsoft.com/office/drawing/2014/main" id="{A7BE9E2A-03F0-49EB-97CE-C1082EF88EC1}"/>
+              </a:ext>
+            </a:extLst>
+          </p:cNvPr>
+          <p:cNvSpPr>
+            <a:spLocks xmlns:a="http://schemas.openxmlformats.org/drawingml/2006/main" noGrp="1"/>
+          </p:cNvSpPr>
+          <p:nvPr/>
+        </p:nvSpPr>
+        <p:spPr>
+          <a:xfrm xmlns:a="http://schemas.openxmlformats.org/drawingml/2006/main">
+            <a:off x="9048750" y="3067050"/>
+            <a:ext cx="2571750" cy="2381250"/>
           </a:xfrm>
           <a:prstGeom xmlns:a="http://schemas.openxmlformats.org/drawingml/2006/main" prst="rect">
             <a:avLst/>
@@ -3176,7 +3176,7 @@
           <a:lstStyle xmlns:a="http://schemas.openxmlformats.org/drawingml/2006/main"/>
           <a:p xmlns:a="http://schemas.openxmlformats.org/drawingml/2006/main">
             <a:pPr>
-              <a:defRPr sz="1500">
+              <a:defRPr sz="1350">
                 <a:solidFill>
                   <a:srgbClr val="1B1D21"/>
                 </a:solidFill>
@@ -3186,7 +3186,7 @@
               </a:defRPr>
             </a:pPr>
             <a:r>
-              <a:rPr sz="1500">
+              <a:rPr sz="1350">
                 <a:solidFill>
                   <a:srgbClr val="1B1D21"/>
                 </a:solidFill>
@@ -3194,7 +3194,30 @@
                 <a:ea typeface="IBM Plex Sans KR"/>
                 <a:cs typeface="IBM Plex Sans KR"/>
               </a:rPr>
-              <a:t>시간대별 평균 이용 인원을 계산했습니다.</a:t>
+              <a:t>시간대별 평균 이용 인원을</a:t>
+            </a:r>
+          </a:p>
+          <a:p xmlns:a="http://schemas.openxmlformats.org/drawingml/2006/main">
+            <a:pPr>
+              <a:defRPr sz="1350">
+                <a:solidFill>
+                  <a:srgbClr val="1B1D21"/>
+                </a:solidFill>
+                <a:latin typeface="IBM Plex Sans KR"/>
+                <a:ea typeface="IBM Plex Sans KR"/>
+                <a:cs typeface="IBM Plex Sans KR"/>
+              </a:defRPr>
+            </a:pPr>
+            <a:r>
+              <a:rPr sz="1350">
+                <a:solidFill>
+                  <a:srgbClr val="1B1D21"/>
+                </a:solidFill>
+                <a:latin typeface="IBM Plex Sans KR"/>
+                <a:ea typeface="IBM Plex Sans KR"/>
+                <a:cs typeface="IBM Plex Sans KR"/>
+              </a:rPr>
+              <a:t>계산했습니다.</a:t>
             </a:r>
           </a:p>
           <a:p xmlns:a="http://schemas.openxmlformats.org/drawingml/2006/main">
@@ -3204,7 +3227,7 @@
           </a:p>
           <a:p xmlns:a="http://schemas.openxmlformats.org/drawingml/2006/main">
             <a:pPr>
-              <a:defRPr sz="1500">
+              <a:defRPr sz="1350">
                 <a:solidFill>
                   <a:srgbClr val="1B1D21"/>
                 </a:solidFill>
@@ -3214,7 +3237,7 @@
               </a:defRPr>
             </a:pPr>
             <a:r>
-              <a:rPr sz="1500">
+              <a:rPr sz="1350">
                 <a:solidFill>
                   <a:srgbClr val="1B1D21"/>
                 </a:solidFill>
@@ -3222,7 +3245,53 @@
                 <a:ea typeface="IBM Plex Sans KR"/>
                 <a:cs typeface="IBM Plex Sans KR"/>
               </a:rPr>
-              <a:t>시간의 흐름에 따라 값이 어떻게 달라지는지 보려고 선으로 연결했습니다.</a:t>
+              <a:t>시간의 흐름에 따라 값이</a:t>
+            </a:r>
+          </a:p>
+          <a:p xmlns:a="http://schemas.openxmlformats.org/drawingml/2006/main">
+            <a:pPr>
+              <a:defRPr sz="1350">
+                <a:solidFill>
+                  <a:srgbClr val="1B1D21"/>
+                </a:solidFill>
+                <a:latin typeface="IBM Plex Sans KR"/>
+                <a:ea typeface="IBM Plex Sans KR"/>
+                <a:cs typeface="IBM Plex Sans KR"/>
+              </a:defRPr>
+            </a:pPr>
+            <a:r>
+              <a:rPr sz="1350">
+                <a:solidFill>
+                  <a:srgbClr val="1B1D21"/>
+                </a:solidFill>
+                <a:latin typeface="IBM Plex Sans KR"/>
+                <a:ea typeface="IBM Plex Sans KR"/>
+                <a:cs typeface="IBM Plex Sans KR"/>
+              </a:rPr>
+              <a:t>어떻게 달라지는지 보려고</a:t>
+            </a:r>
+          </a:p>
+          <a:p xmlns:a="http://schemas.openxmlformats.org/drawingml/2006/main">
+            <a:pPr>
+              <a:defRPr sz="1350">
+                <a:solidFill>
+                  <a:srgbClr val="1B1D21"/>
+                </a:solidFill>
+                <a:latin typeface="IBM Plex Sans KR"/>
+                <a:ea typeface="IBM Plex Sans KR"/>
+                <a:cs typeface="IBM Plex Sans KR"/>
+              </a:defRPr>
+            </a:pPr>
+            <a:r>
+              <a:rPr sz="1350">
+                <a:solidFill>
+                  <a:srgbClr val="1B1D21"/>
+                </a:solidFill>
+                <a:latin typeface="IBM Plex Sans KR"/>
+                <a:ea typeface="IBM Plex Sans KR"/>
+                <a:cs typeface="IBM Plex Sans KR"/>
+              </a:rPr>
+              <a:t>선으로 연결했습니다.</a:t>
             </a:r>
           </a:p>
         </p:txBody>
@@ -3232,7 +3301,7 @@
           <p:cNvPr id="10" name="">
             <a:extLst xmlns:a="http://schemas.openxmlformats.org/drawingml/2006/main">
               <a:ext uri="{FF2B5EF4-FFF2-40B4-BE49-F238E27FC236}">
-                <a16:creationId xmlns:a16="http://schemas.microsoft.com/office/drawing/2014/main" id="{AA68BB25-7B52-4F00-A869-4C908B7EE1B8}"/>
+                <a16:creationId xmlns:a16="http://schemas.microsoft.com/office/drawing/2014/main" id="{FC728C29-40D3-40B7-8410-D505D4B3B81D}"/>
               </a:ext>
             </a:extLst>
           </p:cNvPr>
@@ -3264,7 +3333,7 @@
           <p:cNvPr id="11" name="">
             <a:extLst xmlns:a="http://schemas.openxmlformats.org/drawingml/2006/main">
               <a:ext uri="{FF2B5EF4-FFF2-40B4-BE49-F238E27FC236}">
-                <a16:creationId xmlns:a16="http://schemas.microsoft.com/office/drawing/2014/main" id="{FC4C0E5B-A8E4-4412-B4D0-776A54A2DECA}"/>
+                <a16:creationId xmlns:a16="http://schemas.microsoft.com/office/drawing/2014/main" id="{3A863AF5-B559-44C5-91E1-2666433D7EC1}"/>
               </a:ext>
             </a:extLst>
           </p:cNvPr>
@@ -3321,7 +3390,7 @@
           <p:cNvPr id="12" name="">
             <a:extLst xmlns:a="http://schemas.openxmlformats.org/drawingml/2006/main">
               <a:ext uri="{FF2B5EF4-FFF2-40B4-BE49-F238E27FC236}">
-                <a16:creationId xmlns:a16="http://schemas.microsoft.com/office/drawing/2014/main" id="{494E9BAC-421A-4EAE-AB87-3B7B433D0E44}"/>
+                <a16:creationId xmlns:a16="http://schemas.microsoft.com/office/drawing/2014/main" id="{FDB9FEF6-227D-486A-9553-A65F8A584687}"/>
               </a:ext>
             </a:extLst>
           </p:cNvPr>
@@ -3407,7 +3476,7 @@
           <p:cNvPr id="13" name="">
             <a:extLst xmlns:a="http://schemas.openxmlformats.org/drawingml/2006/main">
               <a:ext uri="{FF2B5EF4-FFF2-40B4-BE49-F238E27FC236}">
-                <a16:creationId xmlns:a16="http://schemas.microsoft.com/office/drawing/2014/main" id="{75D2CA3B-7EDC-455B-91E8-79EF625970C0}"/>
+                <a16:creationId xmlns:a16="http://schemas.microsoft.com/office/drawing/2014/main" id="{3607D443-115F-4B0D-A9CD-FF2563BB2033}"/>
               </a:ext>
             </a:extLst>
           </p:cNvPr>
@@ -3437,7 +3506,7 @@
           <p:cNvPr id="2" name="">
             <a:extLst xmlns:a="http://schemas.openxmlformats.org/drawingml/2006/main">
               <a:ext uri="{FF2B5EF4-FFF2-40B4-BE49-F238E27FC236}">
-                <a16:creationId xmlns:a16="http://schemas.microsoft.com/office/drawing/2014/main" id="{F86CB1A2-D7D2-487B-BF8B-BD94A67D1214}"/>
+                <a16:creationId xmlns:a16="http://schemas.microsoft.com/office/drawing/2014/main" id="{2EE5D823-4464-41C2-A61F-0CBA6FB4796C}"/>
               </a:ext>
             </a:extLst>
           </p:cNvPr>
@@ -3449,7 +3518,7 @@
         <p:spPr>
           <a:xfrm xmlns:a="http://schemas.openxmlformats.org/drawingml/2006/main">
             <a:off x="523875" y="533400"/>
-            <a:ext cx="8858250" cy="476250"/>
+            <a:ext cx="8715375" cy="476250"/>
           </a:xfrm>
           <a:prstGeom xmlns:a="http://schemas.openxmlformats.org/drawingml/2006/main" prst="rect">
             <a:avLst/>
@@ -3494,7 +3563,7 @@
           <p:cNvPr id="3" name="">
             <a:extLst xmlns:a="http://schemas.openxmlformats.org/drawingml/2006/main">
               <a:ext uri="{FF2B5EF4-FFF2-40B4-BE49-F238E27FC236}">
-                <a16:creationId xmlns:a16="http://schemas.microsoft.com/office/drawing/2014/main" id="{05B48920-AA31-465A-B704-D34261641A06}"/>
+                <a16:creationId xmlns:a16="http://schemas.microsoft.com/office/drawing/2014/main" id="{92E7A1C8-E229-4004-823D-9126EFB497C8}"/>
               </a:ext>
             </a:extLst>
           </p:cNvPr>
@@ -3551,7 +3620,7 @@
           <p:cNvPr id="4" name="">
             <a:extLst xmlns:a="http://schemas.openxmlformats.org/drawingml/2006/main">
               <a:ext uri="{FF2B5EF4-FFF2-40B4-BE49-F238E27FC236}">
-                <a16:creationId xmlns:a16="http://schemas.microsoft.com/office/drawing/2014/main" id="{E6CD3DA3-F8D8-4E24-ADC2-545AB011F6F0}"/>
+                <a16:creationId xmlns:a16="http://schemas.microsoft.com/office/drawing/2014/main" id="{E5096ED3-8C0F-4507-97AF-317BF13F73A4}"/>
               </a:ext>
             </a:extLst>
           </p:cNvPr>
@@ -3585,7 +3654,7 @@
           <p:nvPr/>
         </p:nvPicPr>
         <p:blipFill>
-          <a:blip xmlns:r="http://schemas.openxmlformats.org/officeDocument/2006/relationships" xmlns:a="http://schemas.openxmlformats.org/drawingml/2006/main" r:embed="R877551d28cd4432b"/>
+          <a:blip xmlns:r="http://schemas.openxmlformats.org/officeDocument/2006/relationships" xmlns:a="http://schemas.openxmlformats.org/drawingml/2006/main" r:embed="Rae1d9f6bb585448b"/>
           <a:stretch xmlns:a="http://schemas.openxmlformats.org/drawingml/2006/main"/>
         </p:blipFill>
         <p:spPr>
@@ -3603,7 +3672,7 @@
           <p:cNvPr id="6" name="">
             <a:extLst xmlns:a="http://schemas.openxmlformats.org/drawingml/2006/main">
               <a:ext uri="{FF2B5EF4-FFF2-40B4-BE49-F238E27FC236}">
-                <a16:creationId xmlns:a16="http://schemas.microsoft.com/office/drawing/2014/main" id="{36CDD0E0-130B-4B78-9436-76A8FAE3C68A}"/>
+                <a16:creationId xmlns:a16="http://schemas.microsoft.com/office/drawing/2014/main" id="{0B86ED0E-39CB-413A-8FDE-FF454E83E402}"/>
               </a:ext>
             </a:extLst>
           </p:cNvPr>
@@ -3637,7 +3706,7 @@
           <p:cNvPr id="7" name="">
             <a:extLst xmlns:a="http://schemas.openxmlformats.org/drawingml/2006/main">
               <a:ext uri="{FF2B5EF4-FFF2-40B4-BE49-F238E27FC236}">
-                <a16:creationId xmlns:a16="http://schemas.microsoft.com/office/drawing/2014/main" id="{3D065987-1BC0-4BAF-99ED-316CE7361CA2}"/>
+                <a16:creationId xmlns:a16="http://schemas.microsoft.com/office/drawing/2014/main" id="{8EDDE5E0-1369-419F-86BE-47C241D0FF49}"/>
               </a:ext>
             </a:extLst>
           </p:cNvPr>
@@ -3694,7 +3763,7 @@
           <p:cNvPr id="8" name="">
             <a:extLst xmlns:a="http://schemas.openxmlformats.org/drawingml/2006/main">
               <a:ext uri="{FF2B5EF4-FFF2-40B4-BE49-F238E27FC236}">
-                <a16:creationId xmlns:a16="http://schemas.microsoft.com/office/drawing/2014/main" id="{D8B05DC3-3D87-46E1-8C4F-813F74EEE017}"/>
+                <a16:creationId xmlns:a16="http://schemas.microsoft.com/office/drawing/2014/main" id="{3EF409D8-C5C7-4217-9AD4-CEF01575D89F}"/>
               </a:ext>
             </a:extLst>
           </p:cNvPr>
@@ -3751,19 +3820,19 @@
           <p:cNvPr id="9" name="">
             <a:extLst xmlns:a="http://schemas.openxmlformats.org/drawingml/2006/main">
               <a:ext uri="{FF2B5EF4-FFF2-40B4-BE49-F238E27FC236}">
-                <a16:creationId xmlns:a16="http://schemas.microsoft.com/office/drawing/2014/main" id="{A7031790-760F-46E4-82A9-742C13512263}"/>
-              </a:ext>
-            </a:extLst>
-          </p:cNvPr>
-          <p:cNvSpPr>
-            <a:spLocks xmlns:a="http://schemas.openxmlformats.org/drawingml/2006/main" noGrp="1"/>
-          </p:cNvSpPr>
-          <p:nvPr/>
-        </p:nvSpPr>
-        <p:spPr>
-          <a:xfrm xmlns:a="http://schemas.openxmlformats.org/drawingml/2006/main">
-            <a:off x="9124950" y="3067050"/>
-            <a:ext cx="2381250" cy="2381250"/>
+                <a16:creationId xmlns:a16="http://schemas.microsoft.com/office/drawing/2014/main" id="{9D6B971A-EC02-474E-82A3-C8BDF1311442}"/>
+              </a:ext>
+            </a:extLst>
+          </p:cNvPr>
+          <p:cNvSpPr>
+            <a:spLocks xmlns:a="http://schemas.openxmlformats.org/drawingml/2006/main" noGrp="1"/>
+          </p:cNvSpPr>
+          <p:nvPr/>
+        </p:nvSpPr>
+        <p:spPr>
+          <a:xfrm xmlns:a="http://schemas.openxmlformats.org/drawingml/2006/main">
+            <a:off x="9048750" y="3067050"/>
+            <a:ext cx="2571750" cy="2381250"/>
           </a:xfrm>
           <a:prstGeom xmlns:a="http://schemas.openxmlformats.org/drawingml/2006/main" prst="rect">
             <a:avLst/>
@@ -3780,7 +3849,7 @@
           <a:lstStyle xmlns:a="http://schemas.openxmlformats.org/drawingml/2006/main"/>
           <a:p xmlns:a="http://schemas.openxmlformats.org/drawingml/2006/main">
             <a:pPr>
-              <a:defRPr sz="1500">
+              <a:defRPr sz="1350">
                 <a:solidFill>
                   <a:srgbClr val="1B1D21"/>
                 </a:solidFill>
@@ -3790,7 +3859,7 @@
               </a:defRPr>
             </a:pPr>
             <a:r>
-              <a:rPr sz="1500">
+              <a:rPr sz="1350">
                 <a:solidFill>
                   <a:srgbClr val="1B1D21"/>
                 </a:solidFill>
@@ -3798,7 +3867,30 @@
                 <a:ea typeface="IBM Plex Sans KR"/>
                 <a:cs typeface="IBM Plex Sans KR"/>
               </a:rPr>
-              <a:t>장소마다 이용 인원을 모두 더했습니다.</a:t>
+              <a:t>장소마다 이용 인원을</a:t>
+            </a:r>
+          </a:p>
+          <a:p xmlns:a="http://schemas.openxmlformats.org/drawingml/2006/main">
+            <a:pPr>
+              <a:defRPr sz="1350">
+                <a:solidFill>
+                  <a:srgbClr val="1B1D21"/>
+                </a:solidFill>
+                <a:latin typeface="IBM Plex Sans KR"/>
+                <a:ea typeface="IBM Plex Sans KR"/>
+                <a:cs typeface="IBM Plex Sans KR"/>
+              </a:defRPr>
+            </a:pPr>
+            <a:r>
+              <a:rPr sz="1350">
+                <a:solidFill>
+                  <a:srgbClr val="1B1D21"/>
+                </a:solidFill>
+                <a:latin typeface="IBM Plex Sans KR"/>
+                <a:ea typeface="IBM Plex Sans KR"/>
+                <a:cs typeface="IBM Plex Sans KR"/>
+              </a:rPr>
+              <a:t>모두 더했습니다.</a:t>
             </a:r>
           </a:p>
           <a:p xmlns:a="http://schemas.openxmlformats.org/drawingml/2006/main">
@@ -3808,7 +3900,7 @@
           </a:p>
           <a:p xmlns:a="http://schemas.openxmlformats.org/drawingml/2006/main">
             <a:pPr>
-              <a:defRPr sz="1500">
+              <a:defRPr sz="1350">
                 <a:solidFill>
                   <a:srgbClr val="1B1D21"/>
                 </a:solidFill>
@@ -3818,7 +3910,7 @@
               </a:defRPr>
             </a:pPr>
             <a:r>
-              <a:rPr sz="1500">
+              <a:rPr sz="1350">
                 <a:solidFill>
                   <a:srgbClr val="1B1D21"/>
                 </a:solidFill>
@@ -3826,7 +3918,53 @@
                 <a:ea typeface="IBM Plex Sans KR"/>
                 <a:cs typeface="IBM Plex Sans KR"/>
               </a:rPr>
-              <a:t>전체에서 각 장소가 차지하는 비율을 비교하려고 원으로 나누었습니다.</a:t>
+              <a:t>전체에서 각 장소가 차지하는</a:t>
+            </a:r>
+          </a:p>
+          <a:p xmlns:a="http://schemas.openxmlformats.org/drawingml/2006/main">
+            <a:pPr>
+              <a:defRPr sz="1350">
+                <a:solidFill>
+                  <a:srgbClr val="1B1D21"/>
+                </a:solidFill>
+                <a:latin typeface="IBM Plex Sans KR"/>
+                <a:ea typeface="IBM Plex Sans KR"/>
+                <a:cs typeface="IBM Plex Sans KR"/>
+              </a:defRPr>
+            </a:pPr>
+            <a:r>
+              <a:rPr sz="1350">
+                <a:solidFill>
+                  <a:srgbClr val="1B1D21"/>
+                </a:solidFill>
+                <a:latin typeface="IBM Plex Sans KR"/>
+                <a:ea typeface="IBM Plex Sans KR"/>
+                <a:cs typeface="IBM Plex Sans KR"/>
+              </a:rPr>
+              <a:t>비율을 비교하려고</a:t>
+            </a:r>
+          </a:p>
+          <a:p xmlns:a="http://schemas.openxmlformats.org/drawingml/2006/main">
+            <a:pPr>
+              <a:defRPr sz="1350">
+                <a:solidFill>
+                  <a:srgbClr val="1B1D21"/>
+                </a:solidFill>
+                <a:latin typeface="IBM Plex Sans KR"/>
+                <a:ea typeface="IBM Plex Sans KR"/>
+                <a:cs typeface="IBM Plex Sans KR"/>
+              </a:defRPr>
+            </a:pPr>
+            <a:r>
+              <a:rPr sz="1350">
+                <a:solidFill>
+                  <a:srgbClr val="1B1D21"/>
+                </a:solidFill>
+                <a:latin typeface="IBM Plex Sans KR"/>
+                <a:ea typeface="IBM Plex Sans KR"/>
+                <a:cs typeface="IBM Plex Sans KR"/>
+              </a:rPr>
+              <a:t>원으로 나누었습니다.</a:t>
             </a:r>
           </a:p>
         </p:txBody>
@@ -3836,7 +3974,7 @@
           <p:cNvPr id="10" name="">
             <a:extLst xmlns:a="http://schemas.openxmlformats.org/drawingml/2006/main">
               <a:ext uri="{FF2B5EF4-FFF2-40B4-BE49-F238E27FC236}">
-                <a16:creationId xmlns:a16="http://schemas.microsoft.com/office/drawing/2014/main" id="{C4238FDF-B0E0-4E28-B3DC-6342AA6270BB}"/>
+                <a16:creationId xmlns:a16="http://schemas.microsoft.com/office/drawing/2014/main" id="{83328674-795F-424C-96D0-86BA7D88C904}"/>
               </a:ext>
             </a:extLst>
           </p:cNvPr>
@@ -3868,7 +4006,7 @@
           <p:cNvPr id="11" name="">
             <a:extLst xmlns:a="http://schemas.openxmlformats.org/drawingml/2006/main">
               <a:ext uri="{FF2B5EF4-FFF2-40B4-BE49-F238E27FC236}">
-                <a16:creationId xmlns:a16="http://schemas.microsoft.com/office/drawing/2014/main" id="{E3837810-5E03-460F-9F36-298291E0EC78}"/>
+                <a16:creationId xmlns:a16="http://schemas.microsoft.com/office/drawing/2014/main" id="{874C399A-93B8-4AD8-828E-74A458ABC2C1}"/>
               </a:ext>
             </a:extLst>
           </p:cNvPr>
@@ -3925,7 +4063,7 @@
           <p:cNvPr id="12" name="">
             <a:extLst xmlns:a="http://schemas.openxmlformats.org/drawingml/2006/main">
               <a:ext uri="{FF2B5EF4-FFF2-40B4-BE49-F238E27FC236}">
-                <a16:creationId xmlns:a16="http://schemas.microsoft.com/office/drawing/2014/main" id="{167241BA-69BC-4769-861B-74D00E3800D5}"/>
+                <a16:creationId xmlns:a16="http://schemas.microsoft.com/office/drawing/2014/main" id="{992F61A2-6B7E-4766-BBC0-D2C3B371389C}"/>
               </a:ext>
             </a:extLst>
           </p:cNvPr>
@@ -4011,7 +4149,7 @@
           <p:cNvPr id="13" name="">
             <a:extLst xmlns:a="http://schemas.openxmlformats.org/drawingml/2006/main">
               <a:ext uri="{FF2B5EF4-FFF2-40B4-BE49-F238E27FC236}">
-                <a16:creationId xmlns:a16="http://schemas.microsoft.com/office/drawing/2014/main" id="{DF67BF37-B6FF-4B2D-98A5-2060F05AD4BE}"/>
+                <a16:creationId xmlns:a16="http://schemas.microsoft.com/office/drawing/2014/main" id="{A694C577-3FB8-432E-9379-10B71A27F09A}"/>
               </a:ext>
             </a:extLst>
           </p:cNvPr>
@@ -4041,7 +4179,7 @@
           <p:cNvPr id="2" name="">
             <a:extLst xmlns:a="http://schemas.openxmlformats.org/drawingml/2006/main">
               <a:ext uri="{FF2B5EF4-FFF2-40B4-BE49-F238E27FC236}">
-                <a16:creationId xmlns:a16="http://schemas.microsoft.com/office/drawing/2014/main" id="{CAEEE8C0-C0B3-47C9-86D4-E761106255B5}"/>
+                <a16:creationId xmlns:a16="http://schemas.microsoft.com/office/drawing/2014/main" id="{623D8E3E-DB89-44D5-9A99-9F064ED63FCC}"/>
               </a:ext>
             </a:extLst>
           </p:cNvPr>
@@ -4053,7 +4191,7 @@
         <p:spPr>
           <a:xfrm xmlns:a="http://schemas.openxmlformats.org/drawingml/2006/main">
             <a:off x="523875" y="533400"/>
-            <a:ext cx="8858250" cy="476250"/>
+            <a:ext cx="8715375" cy="476250"/>
           </a:xfrm>
           <a:prstGeom xmlns:a="http://schemas.openxmlformats.org/drawingml/2006/main" prst="rect">
             <a:avLst/>
@@ -4098,7 +4236,7 @@
           <p:cNvPr id="3" name="">
             <a:extLst xmlns:a="http://schemas.openxmlformats.org/drawingml/2006/main">
               <a:ext uri="{FF2B5EF4-FFF2-40B4-BE49-F238E27FC236}">
-                <a16:creationId xmlns:a16="http://schemas.microsoft.com/office/drawing/2014/main" id="{ECB18DAD-C73F-4420-9ED5-450FEA517A62}"/>
+                <a16:creationId xmlns:a16="http://schemas.microsoft.com/office/drawing/2014/main" id="{2548EECD-133B-41BB-B93C-E18E62E2CD33}"/>
               </a:ext>
             </a:extLst>
           </p:cNvPr>
@@ -4155,7 +4293,7 @@
           <p:cNvPr id="4" name="">
             <a:extLst xmlns:a="http://schemas.openxmlformats.org/drawingml/2006/main">
               <a:ext uri="{FF2B5EF4-FFF2-40B4-BE49-F238E27FC236}">
-                <a16:creationId xmlns:a16="http://schemas.microsoft.com/office/drawing/2014/main" id="{2EBC9471-3604-47AB-88A1-128D06079D15}"/>
+                <a16:creationId xmlns:a16="http://schemas.microsoft.com/office/drawing/2014/main" id="{C37BCB42-B592-4E3F-98C9-1FBD91BB0A4F}"/>
               </a:ext>
             </a:extLst>
           </p:cNvPr>
@@ -4189,7 +4327,7 @@
           <p:nvPr/>
         </p:nvPicPr>
         <p:blipFill>
-          <a:blip xmlns:r="http://schemas.openxmlformats.org/officeDocument/2006/relationships" xmlns:a="http://schemas.openxmlformats.org/drawingml/2006/main" r:embed="R96bead5fba634aec"/>
+          <a:blip xmlns:r="http://schemas.openxmlformats.org/officeDocument/2006/relationships" xmlns:a="http://schemas.openxmlformats.org/drawingml/2006/main" r:embed="R6c46598c21e34006"/>
           <a:stretch xmlns:a="http://schemas.openxmlformats.org/drawingml/2006/main"/>
         </p:blipFill>
         <p:spPr>
@@ -4207,7 +4345,7 @@
           <p:cNvPr id="6" name="">
             <a:extLst xmlns:a="http://schemas.openxmlformats.org/drawingml/2006/main">
               <a:ext uri="{FF2B5EF4-FFF2-40B4-BE49-F238E27FC236}">
-                <a16:creationId xmlns:a16="http://schemas.microsoft.com/office/drawing/2014/main" id="{16FC0B3D-4C8A-4C84-8787-829FDF32FE20}"/>
+                <a16:creationId xmlns:a16="http://schemas.microsoft.com/office/drawing/2014/main" id="{A7059E7A-7848-4A9C-8114-711B61F8769A}"/>
               </a:ext>
             </a:extLst>
           </p:cNvPr>
@@ -4241,7 +4379,7 @@
           <p:cNvPr id="7" name="">
             <a:extLst xmlns:a="http://schemas.openxmlformats.org/drawingml/2006/main">
               <a:ext uri="{FF2B5EF4-FFF2-40B4-BE49-F238E27FC236}">
-                <a16:creationId xmlns:a16="http://schemas.microsoft.com/office/drawing/2014/main" id="{136378F0-9803-4F6D-81A4-E6B2415F1EEA}"/>
+                <a16:creationId xmlns:a16="http://schemas.microsoft.com/office/drawing/2014/main" id="{9357FC2C-E680-41CC-97A5-371D3B8FCC72}"/>
               </a:ext>
             </a:extLst>
           </p:cNvPr>
@@ -4298,7 +4436,7 @@
           <p:cNvPr id="8" name="">
             <a:extLst xmlns:a="http://schemas.openxmlformats.org/drawingml/2006/main">
               <a:ext uri="{FF2B5EF4-FFF2-40B4-BE49-F238E27FC236}">
-                <a16:creationId xmlns:a16="http://schemas.microsoft.com/office/drawing/2014/main" id="{896ECBBD-BB65-47DC-AFA0-F302C431EF07}"/>
+                <a16:creationId xmlns:a16="http://schemas.microsoft.com/office/drawing/2014/main" id="{457BBC1B-21CC-40AB-ABC5-1CB49353E2BF}"/>
               </a:ext>
             </a:extLst>
           </p:cNvPr>
@@ -4355,19 +4493,19 @@
           <p:cNvPr id="9" name="">
             <a:extLst xmlns:a="http://schemas.openxmlformats.org/drawingml/2006/main">
               <a:ext uri="{FF2B5EF4-FFF2-40B4-BE49-F238E27FC236}">
-                <a16:creationId xmlns:a16="http://schemas.microsoft.com/office/drawing/2014/main" id="{E2BB9B2A-5733-4D6F-9355-88A77116E69C}"/>
-              </a:ext>
-            </a:extLst>
-          </p:cNvPr>
-          <p:cNvSpPr>
-            <a:spLocks xmlns:a="http://schemas.openxmlformats.org/drawingml/2006/main" noGrp="1"/>
-          </p:cNvSpPr>
-          <p:nvPr/>
-        </p:nvSpPr>
-        <p:spPr>
-          <a:xfrm xmlns:a="http://schemas.openxmlformats.org/drawingml/2006/main">
-            <a:off x="9124950" y="3067050"/>
-            <a:ext cx="2381250" cy="2381250"/>
+                <a16:creationId xmlns:a16="http://schemas.microsoft.com/office/drawing/2014/main" id="{9F144B0E-B1BE-49C0-8503-50B5552EF388}"/>
+              </a:ext>
+            </a:extLst>
+          </p:cNvPr>
+          <p:cNvSpPr>
+            <a:spLocks xmlns:a="http://schemas.openxmlformats.org/drawingml/2006/main" noGrp="1"/>
+          </p:cNvSpPr>
+          <p:nvPr/>
+        </p:nvSpPr>
+        <p:spPr>
+          <a:xfrm xmlns:a="http://schemas.openxmlformats.org/drawingml/2006/main">
+            <a:off x="9048750" y="3067050"/>
+            <a:ext cx="2571750" cy="2381250"/>
           </a:xfrm>
           <a:prstGeom xmlns:a="http://schemas.openxmlformats.org/drawingml/2006/main" prst="rect">
             <a:avLst/>
@@ -4384,7 +4522,7 @@
           <a:lstStyle xmlns:a="http://schemas.openxmlformats.org/drawingml/2006/main"/>
           <a:p xmlns:a="http://schemas.openxmlformats.org/drawingml/2006/main">
             <a:pPr>
-              <a:defRPr sz="1500">
+              <a:defRPr sz="1350">
                 <a:solidFill>
                   <a:srgbClr val="1B1D21"/>
                 </a:solidFill>
@@ -4394,7 +4532,7 @@
               </a:defRPr>
             </a:pPr>
             <a:r>
-              <a:rPr sz="1500">
+              <a:rPr sz="1350">
                 <a:solidFill>
                   <a:srgbClr val="1B1D21"/>
                 </a:solidFill>
@@ -4402,7 +4540,30 @@
                 <a:ea typeface="IBM Plex Sans KR"/>
                 <a:cs typeface="IBM Plex Sans KR"/>
               </a:rPr>
-              <a:t>요일마다 평균 이용 인원을 계산했습니다.</a:t>
+              <a:t>요일마다 평균 이용 인원을</a:t>
+            </a:r>
+          </a:p>
+          <a:p xmlns:a="http://schemas.openxmlformats.org/drawingml/2006/main">
+            <a:pPr>
+              <a:defRPr sz="1350">
+                <a:solidFill>
+                  <a:srgbClr val="1B1D21"/>
+                </a:solidFill>
+                <a:latin typeface="IBM Plex Sans KR"/>
+                <a:ea typeface="IBM Plex Sans KR"/>
+                <a:cs typeface="IBM Plex Sans KR"/>
+              </a:defRPr>
+            </a:pPr>
+            <a:r>
+              <a:rPr sz="1350">
+                <a:solidFill>
+                  <a:srgbClr val="1B1D21"/>
+                </a:solidFill>
+                <a:latin typeface="IBM Plex Sans KR"/>
+                <a:ea typeface="IBM Plex Sans KR"/>
+                <a:cs typeface="IBM Plex Sans KR"/>
+              </a:rPr>
+              <a:t>계산했습니다.</a:t>
             </a:r>
           </a:p>
           <a:p xmlns:a="http://schemas.openxmlformats.org/drawingml/2006/main">
@@ -4412,7 +4573,7 @@
           </a:p>
           <a:p xmlns:a="http://schemas.openxmlformats.org/drawingml/2006/main">
             <a:pPr>
-              <a:defRPr sz="1500">
+              <a:defRPr sz="1350">
                 <a:solidFill>
                   <a:srgbClr val="1B1D21"/>
                 </a:solidFill>
@@ -4422,7 +4583,7 @@
               </a:defRPr>
             </a:pPr>
             <a:r>
-              <a:rPr sz="1500">
+              <a:rPr sz="1350">
                 <a:solidFill>
                   <a:srgbClr val="1B1D21"/>
                 </a:solidFill>
@@ -4430,7 +4591,30 @@
                 <a:ea typeface="IBM Plex Sans KR"/>
                 <a:cs typeface="IBM Plex Sans KR"/>
               </a:rPr>
-              <a:t>요일 사이의 크기 차이를 보려고 막대 높이로 비교했습니다.</a:t>
+              <a:t>요일 사이의 크기 차이를 보려고</a:t>
+            </a:r>
+          </a:p>
+          <a:p xmlns:a="http://schemas.openxmlformats.org/drawingml/2006/main">
+            <a:pPr>
+              <a:defRPr sz="1350">
+                <a:solidFill>
+                  <a:srgbClr val="1B1D21"/>
+                </a:solidFill>
+                <a:latin typeface="IBM Plex Sans KR"/>
+                <a:ea typeface="IBM Plex Sans KR"/>
+                <a:cs typeface="IBM Plex Sans KR"/>
+              </a:defRPr>
+            </a:pPr>
+            <a:r>
+              <a:rPr sz="1350">
+                <a:solidFill>
+                  <a:srgbClr val="1B1D21"/>
+                </a:solidFill>
+                <a:latin typeface="IBM Plex Sans KR"/>
+                <a:ea typeface="IBM Plex Sans KR"/>
+                <a:cs typeface="IBM Plex Sans KR"/>
+              </a:rPr>
+              <a:t>막대 높이로 비교했습니다.</a:t>
             </a:r>
           </a:p>
         </p:txBody>
@@ -4440,7 +4624,7 @@
           <p:cNvPr id="10" name="">
             <a:extLst xmlns:a="http://schemas.openxmlformats.org/drawingml/2006/main">
               <a:ext uri="{FF2B5EF4-FFF2-40B4-BE49-F238E27FC236}">
-                <a16:creationId xmlns:a16="http://schemas.microsoft.com/office/drawing/2014/main" id="{5A2D5C43-B843-49C3-9FB3-40F0CE8CF926}"/>
+                <a16:creationId xmlns:a16="http://schemas.microsoft.com/office/drawing/2014/main" id="{9F31CEB8-193D-49AB-9FD2-C675523E92DB}"/>
               </a:ext>
             </a:extLst>
           </p:cNvPr>
@@ -4472,7 +4656,7 @@
           <p:cNvPr id="11" name="">
             <a:extLst xmlns:a="http://schemas.openxmlformats.org/drawingml/2006/main">
               <a:ext uri="{FF2B5EF4-FFF2-40B4-BE49-F238E27FC236}">
-                <a16:creationId xmlns:a16="http://schemas.microsoft.com/office/drawing/2014/main" id="{36D3FA5B-7041-450D-9E36-94870D044195}"/>
+                <a16:creationId xmlns:a16="http://schemas.microsoft.com/office/drawing/2014/main" id="{7C4463C4-1691-4257-AF6B-11CC8B54DFB6}"/>
               </a:ext>
             </a:extLst>
           </p:cNvPr>
@@ -4529,7 +4713,7 @@
           <p:cNvPr id="12" name="">
             <a:extLst xmlns:a="http://schemas.openxmlformats.org/drawingml/2006/main">
               <a:ext uri="{FF2B5EF4-FFF2-40B4-BE49-F238E27FC236}">
-                <a16:creationId xmlns:a16="http://schemas.microsoft.com/office/drawing/2014/main" id="{0E27DA33-DC42-4D74-9937-C28681C91B76}"/>
+                <a16:creationId xmlns:a16="http://schemas.microsoft.com/office/drawing/2014/main" id="{F8F1C214-96B7-4D6E-97C7-2807EABD1FC5}"/>
               </a:ext>
             </a:extLst>
           </p:cNvPr>
@@ -4615,7 +4799,7 @@
           <p:cNvPr id="13" name="">
             <a:extLst xmlns:a="http://schemas.openxmlformats.org/drawingml/2006/main">
               <a:ext uri="{FF2B5EF4-FFF2-40B4-BE49-F238E27FC236}">
-                <a16:creationId xmlns:a16="http://schemas.microsoft.com/office/drawing/2014/main" id="{41AB63D6-3992-4222-A4A5-F40693E5A5CA}"/>
+                <a16:creationId xmlns:a16="http://schemas.microsoft.com/office/drawing/2014/main" id="{16A53022-279E-41C4-B3AA-D245D0E7E921}"/>
               </a:ext>
             </a:extLst>
           </p:cNvPr>
@@ -4645,19 +4829,19 @@
           <p:cNvPr id="2" name="">
             <a:extLst xmlns:a="http://schemas.openxmlformats.org/drawingml/2006/main">
               <a:ext uri="{FF2B5EF4-FFF2-40B4-BE49-F238E27FC236}">
-                <a16:creationId xmlns:a16="http://schemas.microsoft.com/office/drawing/2014/main" id="{5FF46447-D9A1-4CC2-ACA4-2E3AECE29D0B}"/>
-              </a:ext>
-            </a:extLst>
-          </p:cNvPr>
-          <p:cNvSpPr>
-            <a:spLocks xmlns:a="http://schemas.openxmlformats.org/drawingml/2006/main" noGrp="1"/>
-          </p:cNvSpPr>
-          <p:nvPr/>
-        </p:nvSpPr>
-        <p:spPr>
-          <a:xfrm xmlns:a="http://schemas.openxmlformats.org/drawingml/2006/main">
-            <a:off x="523875" y="533400"/>
-            <a:ext cx="8858250" cy="476250"/>
+                <a16:creationId xmlns:a16="http://schemas.microsoft.com/office/drawing/2014/main" id="{D40186C3-D242-4A2A-8EF8-A2AEC705E9D5}"/>
+              </a:ext>
+            </a:extLst>
+          </p:cNvPr>
+          <p:cNvSpPr>
+            <a:spLocks xmlns:a="http://schemas.openxmlformats.org/drawingml/2006/main" noGrp="1"/>
+          </p:cNvSpPr>
+          <p:nvPr/>
+        </p:nvSpPr>
+        <p:spPr>
+          <a:xfrm xmlns:a="http://schemas.openxmlformats.org/drawingml/2006/main">
+            <a:off x="666750" y="533400"/>
+            <a:ext cx="8715375" cy="476250"/>
           </a:xfrm>
           <a:prstGeom xmlns:a="http://schemas.openxmlformats.org/drawingml/2006/main" prst="rect">
             <a:avLst/>
@@ -4669,12 +4853,12 @@
         </p:spPr>
         <p:txBody>
           <a:bodyPr xmlns:a="http://schemas.openxmlformats.org/drawingml/2006/main">
-            <a:normAutofit fontScale="99020"/>
+            <a:normAutofit fontScale="100000"/>
           </a:bodyPr>
           <a:lstStyle xmlns:a="http://schemas.openxmlformats.org/drawingml/2006/main"/>
           <a:p xmlns:a="http://schemas.openxmlformats.org/drawingml/2006/main">
             <a:pPr>
-              <a:defRPr sz="2550" b="1">
+              <a:defRPr sz="2250" b="1">
                 <a:solidFill>
                   <a:srgbClr val="1B1D21"/>
                 </a:solidFill>
@@ -4684,7 +4868,7 @@
               </a:defRPr>
             </a:pPr>
             <a:r>
-              <a:rPr sz="2550" b="1">
+              <a:rPr sz="2250" b="1">
                 <a:solidFill>
                   <a:srgbClr val="1B1D21"/>
                 </a:solidFill>
@@ -4702,7 +4886,7 @@
           <p:cNvPr id="3" name="">
             <a:extLst xmlns:a="http://schemas.openxmlformats.org/drawingml/2006/main">
               <a:ext uri="{FF2B5EF4-FFF2-40B4-BE49-F238E27FC236}">
-                <a16:creationId xmlns:a16="http://schemas.microsoft.com/office/drawing/2014/main" id="{C4EEA41B-73B4-4ADE-9592-2D53EC229A98}"/>
+                <a16:creationId xmlns:a16="http://schemas.microsoft.com/office/drawing/2014/main" id="{83601713-AD91-4FB6-8EBB-4FC848FBB71E}"/>
               </a:ext>
             </a:extLst>
           </p:cNvPr>
@@ -4759,7 +4943,7 @@
           <p:cNvPr id="4" name="">
             <a:extLst xmlns:a="http://schemas.openxmlformats.org/drawingml/2006/main">
               <a:ext uri="{FF2B5EF4-FFF2-40B4-BE49-F238E27FC236}">
-                <a16:creationId xmlns:a16="http://schemas.microsoft.com/office/drawing/2014/main" id="{9CEB11D1-B4BC-48E6-91AF-336561176ED3}"/>
+                <a16:creationId xmlns:a16="http://schemas.microsoft.com/office/drawing/2014/main" id="{420ED6FD-89CF-42C5-A3C1-A03FE5134B4A}"/>
               </a:ext>
             </a:extLst>
           </p:cNvPr>
@@ -4793,7 +4977,7 @@
           <p:nvPr/>
         </p:nvPicPr>
         <p:blipFill>
-          <a:blip xmlns:r="http://schemas.openxmlformats.org/officeDocument/2006/relationships" xmlns:a="http://schemas.openxmlformats.org/drawingml/2006/main" r:embed="Raca96ff35e544784"/>
+          <a:blip xmlns:r="http://schemas.openxmlformats.org/officeDocument/2006/relationships" xmlns:a="http://schemas.openxmlformats.org/drawingml/2006/main" r:embed="Rc1f64c7d1e7d4f9e"/>
           <a:stretch xmlns:a="http://schemas.openxmlformats.org/drawingml/2006/main"/>
         </p:blipFill>
         <p:spPr>
@@ -4811,7 +4995,7 @@
           <p:cNvPr id="6" name="">
             <a:extLst xmlns:a="http://schemas.openxmlformats.org/drawingml/2006/main">
               <a:ext uri="{FF2B5EF4-FFF2-40B4-BE49-F238E27FC236}">
-                <a16:creationId xmlns:a16="http://schemas.microsoft.com/office/drawing/2014/main" id="{048DAE23-7B60-49E7-9D95-83B00D91E3F8}"/>
+                <a16:creationId xmlns:a16="http://schemas.microsoft.com/office/drawing/2014/main" id="{84959964-F5AF-41AF-937D-D4B0653636A5}"/>
               </a:ext>
             </a:extLst>
           </p:cNvPr>
@@ -4845,7 +5029,7 @@
           <p:cNvPr id="7" name="">
             <a:extLst xmlns:a="http://schemas.openxmlformats.org/drawingml/2006/main">
               <a:ext uri="{FF2B5EF4-FFF2-40B4-BE49-F238E27FC236}">
-                <a16:creationId xmlns:a16="http://schemas.microsoft.com/office/drawing/2014/main" id="{0867F96B-A0CA-43E7-AB8A-222ECD7CECD4}"/>
+                <a16:creationId xmlns:a16="http://schemas.microsoft.com/office/drawing/2014/main" id="{02129F21-6BE1-413F-BA1D-376BFAD415BF}"/>
               </a:ext>
             </a:extLst>
           </p:cNvPr>
@@ -4902,7 +5086,7 @@
           <p:cNvPr id="8" name="">
             <a:extLst xmlns:a="http://schemas.openxmlformats.org/drawingml/2006/main">
               <a:ext uri="{FF2B5EF4-FFF2-40B4-BE49-F238E27FC236}">
-                <a16:creationId xmlns:a16="http://schemas.microsoft.com/office/drawing/2014/main" id="{249B2FB1-314E-45E7-A9BA-A8E8CF58CB6E}"/>
+                <a16:creationId xmlns:a16="http://schemas.microsoft.com/office/drawing/2014/main" id="{25A7BBF4-065B-4872-8801-62AB958CF37A}"/>
               </a:ext>
             </a:extLst>
           </p:cNvPr>
@@ -4959,19 +5143,19 @@
           <p:cNvPr id="9" name="">
             <a:extLst xmlns:a="http://schemas.openxmlformats.org/drawingml/2006/main">
               <a:ext uri="{FF2B5EF4-FFF2-40B4-BE49-F238E27FC236}">
-                <a16:creationId xmlns:a16="http://schemas.microsoft.com/office/drawing/2014/main" id="{EEAA2B81-A666-4AFF-AA37-3B2F2E789A1D}"/>
-              </a:ext>
-            </a:extLst>
-          </p:cNvPr>
-          <p:cNvSpPr>
-            <a:spLocks xmlns:a="http://schemas.openxmlformats.org/drawingml/2006/main" noGrp="1"/>
-          </p:cNvSpPr>
-          <p:nvPr/>
-        </p:nvSpPr>
-        <p:spPr>
-          <a:xfrm xmlns:a="http://schemas.openxmlformats.org/drawingml/2006/main">
-            <a:off x="9124950" y="3067050"/>
-            <a:ext cx="2381250" cy="2381250"/>
+                <a16:creationId xmlns:a16="http://schemas.microsoft.com/office/drawing/2014/main" id="{E9499712-50E7-4B52-A6BD-069900021998}"/>
+              </a:ext>
+            </a:extLst>
+          </p:cNvPr>
+          <p:cNvSpPr>
+            <a:spLocks xmlns:a="http://schemas.openxmlformats.org/drawingml/2006/main" noGrp="1"/>
+          </p:cNvSpPr>
+          <p:nvPr/>
+        </p:nvSpPr>
+        <p:spPr>
+          <a:xfrm xmlns:a="http://schemas.openxmlformats.org/drawingml/2006/main">
+            <a:off x="9048750" y="3067050"/>
+            <a:ext cx="2571750" cy="2381250"/>
           </a:xfrm>
           <a:prstGeom xmlns:a="http://schemas.openxmlformats.org/drawingml/2006/main" prst="rect">
             <a:avLst/>
@@ -4988,7 +5172,7 @@
           <a:lstStyle xmlns:a="http://schemas.openxmlformats.org/drawingml/2006/main"/>
           <a:p xmlns:a="http://schemas.openxmlformats.org/drawingml/2006/main">
             <a:pPr>
-              <a:defRPr sz="1500">
+              <a:defRPr sz="1350">
                 <a:solidFill>
                   <a:srgbClr val="1B1D21"/>
                 </a:solidFill>
@@ -4998,7 +5182,7 @@
               </a:defRPr>
             </a:pPr>
             <a:r>
-              <a:rPr sz="1500">
+              <a:rPr sz="1350">
                 <a:solidFill>
                   <a:srgbClr val="1B1D21"/>
                 </a:solidFill>
@@ -5006,7 +5190,30 @@
                 <a:ea typeface="IBM Plex Sans KR"/>
                 <a:cs typeface="IBM Plex Sans KR"/>
               </a:rPr>
-              <a:t>요일과 시간대를 묶어 평균 이용 인원을 계산했습니다.</a:t>
+              <a:t>요일과 시간대를 묶어</a:t>
+            </a:r>
+          </a:p>
+          <a:p xmlns:a="http://schemas.openxmlformats.org/drawingml/2006/main">
+            <a:pPr>
+              <a:defRPr sz="1350">
+                <a:solidFill>
+                  <a:srgbClr val="1B1D21"/>
+                </a:solidFill>
+                <a:latin typeface="IBM Plex Sans KR"/>
+                <a:ea typeface="IBM Plex Sans KR"/>
+                <a:cs typeface="IBM Plex Sans KR"/>
+              </a:defRPr>
+            </a:pPr>
+            <a:r>
+              <a:rPr sz="1350">
+                <a:solidFill>
+                  <a:srgbClr val="1B1D21"/>
+                </a:solidFill>
+                <a:latin typeface="IBM Plex Sans KR"/>
+                <a:ea typeface="IBM Plex Sans KR"/>
+                <a:cs typeface="IBM Plex Sans KR"/>
+              </a:rPr>
+              <a:t>평균 이용 인원을 계산했습니다.</a:t>
             </a:r>
           </a:p>
           <a:p xmlns:a="http://schemas.openxmlformats.org/drawingml/2006/main">
@@ -5016,7 +5223,7 @@
           </a:p>
           <a:p xmlns:a="http://schemas.openxmlformats.org/drawingml/2006/main">
             <a:pPr>
-              <a:defRPr sz="1500">
+              <a:defRPr sz="1350">
                 <a:solidFill>
                   <a:srgbClr val="1B1D21"/>
                 </a:solidFill>
@@ -5026,7 +5233,7 @@
               </a:defRPr>
             </a:pPr>
             <a:r>
-              <a:rPr sz="1500">
+              <a:rPr sz="1350">
                 <a:solidFill>
                   <a:srgbClr val="1B1D21"/>
                 </a:solidFill>
@@ -5034,7 +5241,30 @@
                 <a:ea typeface="IBM Plex Sans KR"/>
                 <a:cs typeface="IBM Plex Sans KR"/>
               </a:rPr>
-              <a:t>값이 클수록 진한 색으로 표시해 붐비는 때를 찾았습니다.</a:t>
+              <a:t>값이 클수록 진한 색으로 표시해</a:t>
+            </a:r>
+          </a:p>
+          <a:p xmlns:a="http://schemas.openxmlformats.org/drawingml/2006/main">
+            <a:pPr>
+              <a:defRPr sz="1350">
+                <a:solidFill>
+                  <a:srgbClr val="1B1D21"/>
+                </a:solidFill>
+                <a:latin typeface="IBM Plex Sans KR"/>
+                <a:ea typeface="IBM Plex Sans KR"/>
+                <a:cs typeface="IBM Plex Sans KR"/>
+              </a:defRPr>
+            </a:pPr>
+            <a:r>
+              <a:rPr sz="1350">
+                <a:solidFill>
+                  <a:srgbClr val="1B1D21"/>
+                </a:solidFill>
+                <a:latin typeface="IBM Plex Sans KR"/>
+                <a:ea typeface="IBM Plex Sans KR"/>
+                <a:cs typeface="IBM Plex Sans KR"/>
+              </a:rPr>
+              <a:t>붐비는 때를 찾았습니다.</a:t>
             </a:r>
           </a:p>
         </p:txBody>
@@ -5044,7 +5274,7 @@
           <p:cNvPr id="10" name="">
             <a:extLst xmlns:a="http://schemas.openxmlformats.org/drawingml/2006/main">
               <a:ext uri="{FF2B5EF4-FFF2-40B4-BE49-F238E27FC236}">
-                <a16:creationId xmlns:a16="http://schemas.microsoft.com/office/drawing/2014/main" id="{59BE7358-3E5C-4D32-BE60-05AB0126B6E3}"/>
+                <a16:creationId xmlns:a16="http://schemas.microsoft.com/office/drawing/2014/main" id="{07CDC4C2-66CD-46FB-BEA1-BD0EEFB9F031}"/>
               </a:ext>
             </a:extLst>
           </p:cNvPr>
@@ -5076,7 +5306,7 @@
           <p:cNvPr id="11" name="">
             <a:extLst xmlns:a="http://schemas.openxmlformats.org/drawingml/2006/main">
               <a:ext uri="{FF2B5EF4-FFF2-40B4-BE49-F238E27FC236}">
-                <a16:creationId xmlns:a16="http://schemas.microsoft.com/office/drawing/2014/main" id="{0C5D555D-6423-4A56-9AC8-6AEF68935B4E}"/>
+                <a16:creationId xmlns:a16="http://schemas.microsoft.com/office/drawing/2014/main" id="{B9E08BB8-9EB3-4B97-9BBD-079EC7FD5E2F}"/>
               </a:ext>
             </a:extLst>
           </p:cNvPr>
@@ -5133,7 +5363,7 @@
           <p:cNvPr id="12" name="">
             <a:extLst xmlns:a="http://schemas.openxmlformats.org/drawingml/2006/main">
               <a:ext uri="{FF2B5EF4-FFF2-40B4-BE49-F238E27FC236}">
-                <a16:creationId xmlns:a16="http://schemas.microsoft.com/office/drawing/2014/main" id="{C32B9232-30D2-4499-8AF0-A7B804996A7E}"/>
+                <a16:creationId xmlns:a16="http://schemas.microsoft.com/office/drawing/2014/main" id="{E4951CCD-49CF-4901-A71B-38CB09A089DA}"/>
               </a:ext>
             </a:extLst>
           </p:cNvPr>
